--- a/public/materialy/1L/7/Prezentace k hodinám/7. Fake news a obsah od AI.pptx
+++ b/public/materialy/1L/7/Prezentace k hodinám/7. Fake news a obsah od AI.pptx
@@ -548,7 +548,7 @@
           </a:p>
           <a:p xmlns:a="http://schemas.openxmlformats.org/drawingml/2006/main">
             <a:r>
-              <a:t>Soubory: 07_neovereny_prispevek.html z balíčku V2, digitální pracovní sešit</a:t>
+              <a:t>Soubory: 7. Neověřený příspěvek.html z balíčku V2, digitální pracovní sešit</a:t>
             </a:r>
           </a:p>
           <a:p xmlns:a="http://schemas.openxmlformats.org/drawingml/2006/main">
@@ -808,7 +808,7 @@
           <a:lstStyle xmlns:a="http://schemas.openxmlformats.org/drawingml/2006/main"/>
           <a:p xmlns:a="http://schemas.openxmlformats.org/drawingml/2006/main">
             <a:r>
-              <a:t>Hlavní aktivita využívá: 07_neovereny_prispevek.html z balíčku V2, digitální pracovní sešit</a:t>
+              <a:t>Hlavní aktivita využívá: 7. Neověřený příspěvek.html z balíčku V2, digitální pracovní sešit</a:t>
             </a:r>
           </a:p>
           <a:p xmlns:a="http://schemas.openxmlformats.org/drawingml/2006/main">
@@ -3485,7 +3485,7 @@
               </a:defRPr>
             </a:pPr>
             <a:r>
-              <a:t>07_neovereny_prispevek.html z balíčku V2, digitální pracovní sešit</a:t>
+              <a:t>7. Neověřený příspěvek.html z balíčku V2, digitální pracovní sešit</a:t>
             </a:r>
           </a:p>
         </p:txBody>

--- a/public/materialy/1L/7/Prezentace k hodinám/7. Fake news a obsah od AI.pptx
+++ b/public/materialy/1L/7/Prezentace k hodinám/7. Fake news a obsah od AI.pptx
@@ -3485,7 +3485,7 @@
               </a:defRPr>
             </a:pPr>
             <a:r>
-              <a:t>7. Neověřený příspěvek.html z balíčku V2, digitální pracovní sešit</a:t>
+              <a:t>7. Neověřený příspěvek.html ze složky Podklady k aktivitám, digitální pracovní sešit</a:t>
             </a:r>
           </a:p>
         </p:txBody>

--- a/public/materialy/1L/7/Prezentace k hodinám/7. Fake news a obsah od AI.pptx
+++ b/public/materialy/1L/7/Prezentace k hodinám/7. Fake news a obsah od AI.pptx
@@ -558,7 +558,7 @@
           </a:p>
           <a:p xmlns:a="http://schemas.openxmlformats.org/drawingml/2006/main">
             <a:r>
-              <a:t>Před otevřením dalšího snímku stručně uveďte téma a nechte studenty připravit pracovní soubory.</a:t>
+              <a:t>Před otevřením dalšího snímku stručně uveď téma a nech studenty připravit pracovní soubory.</a:t>
             </a:r>
           </a:p>
         </p:txBody>
@@ -648,7 +648,7 @@
           </a:p>
           <a:p xmlns:a="http://schemas.openxmlformats.org/drawingml/2006/main">
             <a:r>
-              <a:t>Neprozrazujte správnou odpověď. Cílem je zachytit počáteční úsudek, ke kterému se třída vrátí při reflexi.</a:t>
+              <a:t>Neprozrazuj správnou odpověď. Cílem je zachytit počáteční úsudek, ke kterému se třída vrátí při reflexi.</a:t>
             </a:r>
           </a:p>
         </p:txBody>
@@ -728,7 +728,7 @@
           </a:p>
           <a:p xmlns:a="http://schemas.openxmlformats.org/drawingml/2006/main">
             <a:r>
-              <a:t>Postup učitele: Oddělte, co příspěvek tvrdí, čím to dokládá a k čemu vyzývá.</a:t>
+              <a:t>Postup učitele: Odděl, co příspěvek tvrdí, čím to dokládá a k čemu vyzývá.</a:t>
             </a:r>
           </a:p>
           <a:p xmlns:a="http://schemas.openxmlformats.org/drawingml/2006/main">
@@ -738,7 +738,7 @@
           </a:p>
           <a:p xmlns:a="http://schemas.openxmlformats.org/drawingml/2006/main">
             <a:r>
-              <a:t>Nechte studenty doplnit příklad ke každému bodu. Přechod k aktivitě proveďte otázkou: Jak tyto tři body použijeme na dnešní soubor?</a:t>
+              <a:t>Nech studenty doplnit příklad ke každému bodu. Přechod k aktivitě proveď otázkou: Jak tyto tři body použijeme na dnešní soubor?</a:t>
             </a:r>
           </a:p>
         </p:txBody>
@@ -818,7 +818,7 @@
           </a:p>
           <a:p xmlns:a="http://schemas.openxmlformats.org/drawingml/2006/main">
             <a:r>
-              <a:t>25–34 min – Plán ověření: Vyžadujte původ snímku, datum, vyjádření školy/jídelny a nezávislý zdroj.</a:t>
+              <a:t>25–34 min – Plán ověření: Vyžaduj původ snímku, datum, vyjádření školy/jídelny a nezávislý zdroj.</a:t>
             </a:r>
           </a:p>
           <a:p xmlns:a="http://schemas.openxmlformats.org/drawingml/2006/main">
@@ -838,7 +838,7 @@
           </a:p>
           <a:p xmlns:a="http://schemas.openxmlformats.org/drawingml/2006/main">
             <a:r>
-              <a:t>Během práce nepřebírejte myš za studenta. Pomáhejte otázkami z dalšího snímku a žádejte, aby každé rozhodnutí opřel o konkrétní znak nebo zdroj.</a:t>
+              <a:t>Během práce nepřebírej myš za studenta. Pomáhej otázkami z dalšího snímku a žádej, aby každé rozhodnutí opřel o konkrétní znak nebo zdroj.</a:t>
             </a:r>
           </a:p>
         </p:txBody>
@@ -918,7 +918,7 @@
           </a:p>
           <a:p xmlns:a="http://schemas.openxmlformats.org/drawingml/2006/main">
             <a:r>
-              <a:t>Podpora: Poskytněte tabulku se sloupci tvrzení – důkaz – co chybí – jak ověřit.</a:t>
+              <a:t>Podpora: Poskytni tabulku se sloupci tvrzení – důkaz – co chybí – jak ověřit.</a:t>
             </a:r>
           </a:p>
           <a:p xmlns:a="http://schemas.openxmlformats.org/drawingml/2006/main">
@@ -928,7 +928,7 @@
           </a:p>
           <a:p xmlns:a="http://schemas.openxmlformats.org/drawingml/2006/main">
             <a:r>
-              <a:t>Pro rychlou mezikontrolu nechte dvojice vyměnit výstup a označit jeden dobře doložený bod a jednu otázku, která ještě zůstává.</a:t>
+              <a:t>Pro rychlou mezikontrolu nech dvojice vyměnit výstup a označit jeden dobře doložený bod a jednu otázku, která ještě zůstává.</a:t>
             </a:r>
           </a:p>
         </p:txBody>
@@ -1003,12 +1003,12 @@
           </a:p>
           <a:p xmlns:a="http://schemas.openxmlformats.org/drawingml/2006/main">
             <a:r>
-              <a:t>Časté chyby a intervence: „Fotografie je důkaz, protože vypadá reálně.“ → Realističnost neprokazuje místo, datum ani souvislost s tvrzením. | „Je to určitě AI.“ → Bez podkladů nepřidávejte nové tvrzení; zaměřte se na dohledatelný původ a kontext. | „Dezinformace je každá nepravda.“ → Záměr bývá obtížné prokázat; používejte přesné termíny neověřené, zavádějící nebo nepravdivé tvrzení.</a:t>
-            </a:r>
-          </a:p>
-          <a:p xmlns:a="http://schemas.openxmlformats.org/drawingml/2006/main">
-            <a:r>
-              <a:t>Nečtěte celý klíč. Vyberte dva studentské postupy, které vedou k odlišným závěrům, a nechte třídu určit, který je lépe podložený.</a:t>
+              <a:t>Časté chyby a intervence: „Fotografie je důkaz, protože vypadá reálně.“ → Realističnost neprokazuje místo, datum ani souvislost s tvrzením. | „Je to určitě AI.“ → Bez podkladů nepřidávej nové tvrzení; zaměř se na dohledatelný původ a kontext. | „Dezinformace je každá nepravda.“ → Záměr bývá obtížné prokázat; používej přesné termíny neověřené, zavádějící nebo nepravdivé tvrzení.</a:t>
+            </a:r>
+          </a:p>
+          <a:p xmlns:a="http://schemas.openxmlformats.org/drawingml/2006/main">
+            <a:r>
+              <a:t>Nečti celý klíč. Vyber dva studentské postupy, které vedou k odlišným závěrům, a nech třídu určit, který je lépe podložený.</a:t>
             </a:r>
           </a:p>
         </p:txBody>
@@ -1083,7 +1083,7 @@
           </a:p>
           <a:p xmlns:a="http://schemas.openxmlformats.org/drawingml/2006/main">
             <a:r>
-              <a:t>Podpora: Poskytněte tabulku se sloupci tvrzení – důkaz – co chybí – jak ověřit.</a:t>
+              <a:t>Podpora: Poskytni tabulku se sloupci tvrzení – důkaz – co chybí – jak ověřit.</a:t>
             </a:r>
           </a:p>
           <a:p xmlns:a="http://schemas.openxmlformats.org/drawingml/2006/main">
@@ -1093,12 +1093,12 @@
           </a:p>
           <a:p xmlns:a="http://schemas.openxmlformats.org/drawingml/2006/main">
             <a:r>
-              <a:t>Když technika selže: Ukázka je offline; pokud nefunguje HTML, použijte text a popis fotografie v pracovním sešitu.</a:t>
-            </a:r>
-          </a:p>
-          <a:p xmlns:a="http://schemas.openxmlformats.org/drawingml/2006/main">
-            <a:r>
-              <a:t>Vyberte způsob odevzdání předem. Odpověď použijte jako diagnostiku pro začátek další hodiny; nehodnoťte pouze formální správnost, ale konkrétnost a zdůvodnění.</a:t>
+              <a:t>Když technika selže: Ukázka je offline; pokud nefunguje HTML, použij text a popis fotografie v pracovním sešitu.</a:t>
+            </a:r>
+          </a:p>
+          <a:p xmlns:a="http://schemas.openxmlformats.org/drawingml/2006/main">
+            <a:r>
+              <a:t>Vyber způsob odevzdání předem. Odpověď použij jako diagnostiku pro začátek další hodiny; nehodnoť pouze formální správnost, ale konkrétnost a zdůvodnění.</a:t>
             </a:r>
           </a:p>
         </p:txBody>

--- a/public/materialy/1L/7/Prezentace k hodinám/7. Fake news a obsah od AI.pptx
+++ b/public/materialy/1L/7/Prezentace k hodinám/7. Fake news a obsah od AI.pptx
@@ -548,7 +548,7 @@
           </a:p>
           <a:p xmlns:a="http://schemas.openxmlformats.org/drawingml/2006/main">
             <a:r>
-              <a:t>Soubory: 7. Neověřený příspěvek.html z balíčku V2, digitální pracovní sešit</a:t>
+              <a:t>Soubory: Neověřený příspěvek.html z balíčku V2, digitální pracovní sešit</a:t>
             </a:r>
           </a:p>
           <a:p xmlns:a="http://schemas.openxmlformats.org/drawingml/2006/main">
@@ -808,7 +808,7 @@
           <a:lstStyle xmlns:a="http://schemas.openxmlformats.org/drawingml/2006/main"/>
           <a:p xmlns:a="http://schemas.openxmlformats.org/drawingml/2006/main">
             <a:r>
-              <a:t>Hlavní aktivita využívá: 7. Neověřený příspěvek.html z balíčku V2, digitální pracovní sešit</a:t>
+              <a:t>Hlavní aktivita využívá: Neověřený příspěvek.html z balíčku V2, digitální pracovní sešit</a:t>
             </a:r>
           </a:p>
           <a:p xmlns:a="http://schemas.openxmlformats.org/drawingml/2006/main">
@@ -3485,7 +3485,7 @@
               </a:defRPr>
             </a:pPr>
             <a:r>
-              <a:t>7. Neověřený příspěvek.html ze složky Podklady k aktivitám, digitální pracovní sešit</a:t>
+              <a:t>Neověřený příspěvek.html ze složky Podklady k aktivitám, digitální pracovní sešit</a:t>
             </a:r>
           </a:p>
         </p:txBody>

--- a/public/materialy/1L/7/Prezentace k hodinám/7. Fake news a obsah od AI.pptx
+++ b/public/materialy/1L/7/Prezentace k hodinám/7. Fake news a obsah od AI.pptx
@@ -543,22 +543,22 @@
           <a:lstStyle xmlns:a="http://schemas.openxmlformats.org/drawingml/2006/main"/>
           <a:p xmlns:a="http://schemas.openxmlformats.org/drawingml/2006/main">
             <a:r>
-              <a:t>Výukový cíl: Student oddělí tvrzení, emoci a důkaz v realistickém sociálním příspěvku a navrhne ověření fotografie bez ukvapeného závěru.</a:t>
-            </a:r>
-          </a:p>
-          <a:p xmlns:a="http://schemas.openxmlformats.org/drawingml/2006/main">
-            <a:r>
-              <a:t>Soubory: Neověřený příspěvek.html z balíčku V2, digitální pracovní sešit</a:t>
-            </a:r>
-          </a:p>
-          <a:p xmlns:a="http://schemas.openxmlformats.org/drawingml/2006/main">
-            <a:r>
-              <a:t>Výstup: Barevná analýza příspěvku, ověřovací postup a neutrální přepis.</a:t>
-            </a:r>
-          </a:p>
-          <a:p xmlns:a="http://schemas.openxmlformats.org/drawingml/2006/main">
-            <a:r>
-              <a:t>Před otevřením dalšího snímku stručně uveď téma a nech studenty připravit pracovní soubory.</a:t>
+              <a:t>Výukový cíl: Student oddělí tvrzení, emoci a důkaz v realistickém sociálním příspěvku a navrhne ověření fotografie bez ukvapeného závěru.</a:t>
+            </a:r>
+          </a:p>
+          <a:p xmlns:a="http://schemas.openxmlformats.org/drawingml/2006/main">
+            <a:r>
+              <a:t>Soubory: Neověřený příspěvek.html z balíčku V2, digitální pracovní sešit</a:t>
+            </a:r>
+          </a:p>
+          <a:p xmlns:a="http://schemas.openxmlformats.org/drawingml/2006/main">
+            <a:r>
+              <a:t>Výstup: Barevná analýza příspěvku, ověřovací postup a neutrální přepis.</a:t>
+            </a:r>
+          </a:p>
+          <a:p xmlns:a="http://schemas.openxmlformats.org/drawingml/2006/main">
+            <a:r>
+              <a:t>Před otevřením dalšího snímku stručně uveď téma a nech studenty připravit pracovní soubory.</a:t>
             </a:r>
           </a:p>
         </p:txBody>
@@ -638,12 +638,12 @@
           </a:p>
           <a:p xmlns:a="http://schemas.openxmlformats.org/drawingml/2006/main">
             <a:r>
-              <a:t>Postup učitele: Studenti zapíší emoci a první rozhodnutí bez komentáře spolužáků.</a:t>
-            </a:r>
-          </a:p>
-          <a:p xmlns:a="http://schemas.openxmlformats.org/drawingml/2006/main">
-            <a:r>
-              <a:t>Otázka pro studenty: Co fotografie skutečně dokazuje — a co doplnil popisek?</a:t>
+              <a:t>Postup učitele: Studenti zapíší emoci a první rozhodnutí bez komentáře spolužáků.</a:t>
+            </a:r>
+          </a:p>
+          <a:p xmlns:a="http://schemas.openxmlformats.org/drawingml/2006/main">
+            <a:r>
+              <a:t>Otázka pro studenty: Co fotografie skutečně dokazuje — a co doplnil popisek?</a:t>
             </a:r>
           </a:p>
           <a:p xmlns:a="http://schemas.openxmlformats.org/drawingml/2006/main">
@@ -728,17 +728,17 @@
           </a:p>
           <a:p xmlns:a="http://schemas.openxmlformats.org/drawingml/2006/main">
             <a:r>
-              <a:t>Postup učitele: Odděl, co příspěvek tvrdí, čím to dokládá a k čemu vyzývá.</a:t>
-            </a:r>
-          </a:p>
-          <a:p xmlns:a="http://schemas.openxmlformats.org/drawingml/2006/main">
-            <a:r>
-              <a:t>Klíčové závěry: Emoční tlak: Výrazy okamžitě, celý měsíc, média mlčí a kdo nesdílí, tomu nezáleží. | Údajný zdroj: Neurčitý kamarád kamaráda bez jména, dokumentu či možnosti ověření. | Fotografie: Ukazuje běžný výdej jídla, ale neprokazuje datum, školu, prošlost potravin ani délku problému.</a:t>
-            </a:r>
-          </a:p>
-          <a:p xmlns:a="http://schemas.openxmlformats.org/drawingml/2006/main">
-            <a:r>
-              <a:t>Nech studenty doplnit příklad ke každému bodu. Přechod k aktivitě proveď otázkou: Jak tyto tři body použijeme na dnešní soubor?</a:t>
+              <a:t>Postup učitele: Odděl, co příspěvek tvrdí, čím to dokládá a k čemu vyzývá.</a:t>
+            </a:r>
+          </a:p>
+          <a:p xmlns:a="http://schemas.openxmlformats.org/drawingml/2006/main">
+            <a:r>
+              <a:t>Klíčové závěry: Emoční tlak: Výrazy okamžitě, celý měsíc, média mlčí a kdo nesdílí, tomu nezáleží. | Údajný zdroj: Neurčitý kamarád kamaráda bez jména, dokumentu či možnosti ověření. | Fotografie: Ukazuje běžný výdej jídla, ale neprokazuje datum, školu, prošlost potravin ani délku problému.</a:t>
+            </a:r>
+          </a:p>
+          <a:p xmlns:a="http://schemas.openxmlformats.org/drawingml/2006/main">
+            <a:r>
+              <a:t>Nech studenty doplnit příklad ke každému bodu. Přechod k aktivitě proveď otázkou: Jak tyto tři body použijeme na dnešní soubor?</a:t>
             </a:r>
           </a:p>
         </p:txBody>
@@ -808,37 +808,37 @@
           <a:lstStyle xmlns:a="http://schemas.openxmlformats.org/drawingml/2006/main"/>
           <a:p xmlns:a="http://schemas.openxmlformats.org/drawingml/2006/main">
             <a:r>
-              <a:t>Hlavní aktivita využívá: Neověřený příspěvek.html z balíčku V2, digitální pracovní sešit</a:t>
-            </a:r>
-          </a:p>
-          <a:p xmlns:a="http://schemas.openxmlformats.org/drawingml/2006/main">
-            <a:r>
-              <a:t>12–25 min – Barevná analýza: Dvojice zvýrazní text a vysvětlí, proč fotografie sama tvrzení nepotvrzuje.</a:t>
-            </a:r>
-          </a:p>
-          <a:p xmlns:a="http://schemas.openxmlformats.org/drawingml/2006/main">
-            <a:r>
-              <a:t>25–34 min – Plán ověření: Vyžaduj původ snímku, datum, vyjádření školy/jídelny a nezávislý zdroj.</a:t>
-            </a:r>
-          </a:p>
-          <a:p xmlns:a="http://schemas.openxmlformats.org/drawingml/2006/main">
-            <a:r>
-              <a:t>34–38 min – AI a multimédia: Učte kontrolu původu a kontextu, ne seznam údajných vizuálních vad.</a:t>
-            </a:r>
-          </a:p>
-          <a:p xmlns:a="http://schemas.openxmlformats.org/drawingml/2006/main">
-            <a:r>
-              <a:t>38–42 min – Neutrální přepis: Bez nátlaku na sdílení a s jasným označením nejistoty.</a:t>
-            </a:r>
-          </a:p>
-          <a:p xmlns:a="http://schemas.openxmlformats.org/drawingml/2006/main">
-            <a:r>
-              <a:t>Požadovaný výstup: Barevná analýza příspěvku, ověřovací postup a neutrální přepis.</a:t>
-            </a:r>
-          </a:p>
-          <a:p xmlns:a="http://schemas.openxmlformats.org/drawingml/2006/main">
-            <a:r>
-              <a:t>Během práce nepřebírej myš za studenta. Pomáhej otázkami z dalšího snímku a žádej, aby každé rozhodnutí opřel o konkrétní znak nebo zdroj.</a:t>
+              <a:t>Hlavní aktivita využívá: Neověřený příspěvek.html z balíčku V2, digitální pracovní sešit</a:t>
+            </a:r>
+          </a:p>
+          <a:p xmlns:a="http://schemas.openxmlformats.org/drawingml/2006/main">
+            <a:r>
+              <a:t>12–25 min – Barevná analýza: Dvojice zvýrazní text a vysvětlí, proč fotografie sama tvrzení nepotvrzuje.</a:t>
+            </a:r>
+          </a:p>
+          <a:p xmlns:a="http://schemas.openxmlformats.org/drawingml/2006/main">
+            <a:r>
+              <a:t>25–34 min – Plán ověření: Vyžaduj původ snímku, datum, vyjádření školy/jídelny a nezávislý zdroj.</a:t>
+            </a:r>
+          </a:p>
+          <a:p xmlns:a="http://schemas.openxmlformats.org/drawingml/2006/main">
+            <a:r>
+              <a:t>34–38 min – AI a multimédia: Učte kontrolu původu a kontextu, ne seznam údajných vizuálních vad.</a:t>
+            </a:r>
+          </a:p>
+          <a:p xmlns:a="http://schemas.openxmlformats.org/drawingml/2006/main">
+            <a:r>
+              <a:t>38–42 min – Neutrální přepis: Bez nátlaku na sdílení a s jasným označením nejistoty.</a:t>
+            </a:r>
+          </a:p>
+          <a:p xmlns:a="http://schemas.openxmlformats.org/drawingml/2006/main">
+            <a:r>
+              <a:t>Požadovaný výstup: Barevná analýza příspěvku, ověřovací postup a neutrální přepis.</a:t>
+            </a:r>
+          </a:p>
+          <a:p xmlns:a="http://schemas.openxmlformats.org/drawingml/2006/main">
+            <a:r>
+              <a:t>Během práce nepřebírej myš za studenta. Pomáhej otázkami z dalšího snímku a žádej, aby každé rozhodnutí opřel o konkrétní znak nebo zdroj.</a:t>
             </a:r>
           </a:p>
         </p:txBody>
@@ -908,12 +908,12 @@
           <a:lstStyle xmlns:a="http://schemas.openxmlformats.org/drawingml/2006/main"/>
           <a:p xmlns:a="http://schemas.openxmlformats.org/drawingml/2006/main">
             <a:r>
-              <a:t>Kritérium úspěchu: Student označí nejméně tři manipulační prvky a uvede dva nezávislé kroky ověření.</a:t>
-            </a:r>
-          </a:p>
-          <a:p xmlns:a="http://schemas.openxmlformats.org/drawingml/2006/main">
-            <a:r>
-              <a:t>Vodicí otázky: Co přesně fotografie ukazuje a co už do ní vkládá popisek? | Které informace by musely být dohledatelné, aby bylo tvrzení ověřitelné? | Jak by vypadal přepis, který nešíří tvrzení jako fakt?</a:t>
+              <a:t>Kritérium úspěchu: Student označí nejméně tři manipulační prvky a uvede dva nezávislé kroky ověření.</a:t>
+            </a:r>
+          </a:p>
+          <a:p xmlns:a="http://schemas.openxmlformats.org/drawingml/2006/main">
+            <a:r>
+              <a:t>Vodicí otázky: Co přesně fotografie ukazuje a co už do ní vkládá popisek? | Které informace by musely být dohledatelné, aby bylo tvrzení ověřitelné? | Jak by vypadal přepis, který nešíří tvrzení jako fakt?</a:t>
             </a:r>
           </a:p>
           <a:p xmlns:a="http://schemas.openxmlformats.org/drawingml/2006/main">
@@ -923,12 +923,12 @@
           </a:p>
           <a:p xmlns:a="http://schemas.openxmlformats.org/drawingml/2006/main">
             <a:r>
-              <a:t>Rozšíření: Studenti navrhnou komunitní poznámku pod příspěvek v rozsahu nejvýše 300 znaků.</a:t>
-            </a:r>
-          </a:p>
-          <a:p xmlns:a="http://schemas.openxmlformats.org/drawingml/2006/main">
-            <a:r>
-              <a:t>Pro rychlou mezikontrolu nech dvojice vyměnit výstup a označit jeden dobře doložený bod a jednu otázku, která ještě zůstává.</a:t>
+              <a:t>Rozšíření: Studenti navrhnou komunitní poznámku pod příspěvek v rozsahu nejvýše 300 znaků.</a:t>
+            </a:r>
+          </a:p>
+          <a:p xmlns:a="http://schemas.openxmlformats.org/drawingml/2006/main">
+            <a:r>
+              <a:t>Pro rychlou mezikontrolu nech dvojice vyměnit výstup a označit jeden dobře doložený bod a jednu otázku, která ještě zůstává.</a:t>
             </a:r>
           </a:p>
         </p:txBody>
@@ -998,17 +998,17 @@
           <a:lstStyle xmlns:a="http://schemas.openxmlformats.org/drawingml/2006/main"/>
           <a:p xmlns:a="http://schemas.openxmlformats.org/drawingml/2006/main">
             <a:r>
-              <a:t>Očekávané závěry: Emoční tlak: Výrazy okamžitě, celý měsíc, média mlčí a kdo nesdílí, tomu nezáleží. | Údajný zdroj: Neurčitý kamarád kamaráda bez jména, dokumentu či možnosti ověření. | Fotografie: Ukazuje běžný výdej jídla, ale neprokazuje datum, školu, prošlost potravin ani délku problému. | Ověření: Dohledat původ snímku, kontaktovat školu či jídelnu, hledat kontrolní záznam nebo více nezávislých zdrojů. | AI obsah: Posuzovat původ, datum, kontext, návaznost verzí a nezávislé potvrzení; vizuální zvláštnost není sama o sobě důkaz. | Přepis: Na sociální síti se šíří neověřené tvrzení; původ fotografie ani údajné svědectví zatím nejsou doložené a informaci je třeba ověřit.</a:t>
-            </a:r>
-          </a:p>
-          <a:p xmlns:a="http://schemas.openxmlformats.org/drawingml/2006/main">
-            <a:r>
-              <a:t>Časté chyby a intervence: „Fotografie je důkaz, protože vypadá reálně.“ → Realističnost neprokazuje místo, datum ani souvislost s tvrzením. | „Je to určitě AI.“ → Bez podkladů nepřidávej nové tvrzení; zaměř se na dohledatelný původ a kontext. | „Dezinformace je každá nepravda.“ → Záměr bývá obtížné prokázat; používej přesné termíny neověřené, zavádějící nebo nepravdivé tvrzení.</a:t>
-            </a:r>
-          </a:p>
-          <a:p xmlns:a="http://schemas.openxmlformats.org/drawingml/2006/main">
-            <a:r>
-              <a:t>Nečti celý klíč. Vyber dva studentské postupy, které vedou k odlišným závěrům, a nech třídu určit, který je lépe podložený.</a:t>
+              <a:t>Očekávané závěry: Emoční tlak: Výrazy okamžitě, celý měsíc, média mlčí a kdo nesdílí, tomu nezáleží. | Údajný zdroj: Neurčitý kamarád kamaráda bez jména, dokumentu či možnosti ověření. | Fotografie: Ukazuje běžný výdej jídla, ale neprokazuje datum, školu, prošlost potravin ani délku problému. | Ověření: Dohledat původ snímku, kontaktovat školu či jídelnu, hledat kontrolní záznam nebo více nezávislých zdrojů. | AI obsah: Posuzovat původ, datum, kontext, návaznost verzí a nezávislé potvrzení; vizuální zvláštnost není sama o sobě důkaz. | Přepis: Na sociální síti se šíří neověřené tvrzení; původ fotografie ani údajné svědectví zatím nejsou doložené a informaci je třeba ověřit.</a:t>
+            </a:r>
+          </a:p>
+          <a:p xmlns:a="http://schemas.openxmlformats.org/drawingml/2006/main">
+            <a:r>
+              <a:t>Časté chyby a intervence: „Fotografie je důkaz, protože vypadá reálně.“ → Realističnost neprokazuje místo, datum ani souvislost s tvrzením. | „Je to určitě AI.“ → Bez podkladů nepřidávej nové tvrzení; zaměř se na dohledatelný původ a kontext. | „Dezinformace je každá nepravda.“ → Záměr bývá obtížné prokázat; používej přesné termíny neověřené, zavádějící nebo nepravdivé tvrzení.</a:t>
+            </a:r>
+          </a:p>
+          <a:p xmlns:a="http://schemas.openxmlformats.org/drawingml/2006/main">
+            <a:r>
+              <a:t>Nečti celý klíč. Vyber dva studentské postupy, které vedou k odlišným závěrům, a nech třídu určit, který je lépe podložený.</a:t>
             </a:r>
           </a:p>
         </p:txBody>
@@ -1088,17 +1088,17 @@
           </a:p>
           <a:p xmlns:a="http://schemas.openxmlformats.org/drawingml/2006/main">
             <a:r>
-              <a:t>Rozšíření: Studenti navrhnou komunitní poznámku pod příspěvek v rozsahu nejvýše 300 znaků.</a:t>
-            </a:r>
-          </a:p>
-          <a:p xmlns:a="http://schemas.openxmlformats.org/drawingml/2006/main">
-            <a:r>
-              <a:t>Když technika selže: Ukázka je offline; pokud nefunguje HTML, použij text a popis fotografie v pracovním sešitu.</a:t>
-            </a:r>
-          </a:p>
-          <a:p xmlns:a="http://schemas.openxmlformats.org/drawingml/2006/main">
-            <a:r>
-              <a:t>Vyber způsob odevzdání předem. Odpověď použij jako diagnostiku pro začátek další hodiny; nehodnoť pouze formální správnost, ale konkrétnost a zdůvodnění.</a:t>
+              <a:t>Rozšíření: Studenti navrhnou komunitní poznámku pod příspěvek v rozsahu nejvýše 300 znaků.</a:t>
+            </a:r>
+          </a:p>
+          <a:p xmlns:a="http://schemas.openxmlformats.org/drawingml/2006/main">
+            <a:r>
+              <a:t>Když technika selže: Ukázka je offline; pokud nefunguje HTML, použij text a popis fotografie v pracovním sešitu.</a:t>
+            </a:r>
+          </a:p>
+          <a:p xmlns:a="http://schemas.openxmlformats.org/drawingml/2006/main">
+            <a:r>
+              <a:t>Vyber způsob odevzdání předem. Odpověď použij jako diagnostiku pro začátek další hodiny; nehodnoť pouze formální správnost, ale konkrétnost a zdůvodnění.</a:t>
             </a:r>
           </a:p>
         </p:txBody>
@@ -1829,7 +1829,7 @@
             </a:pPr>
             <a:r>
               <a:t>INTERNET, BEZPEČNOST
-A PRÁCE S INFORMACEMI</a:t>
+A PRÁCE S INFORMACEMI</a:t>
             </a:r>
           </a:p>
         </p:txBody>
@@ -1874,7 +1874,7 @@
               </a:defRPr>
             </a:pPr>
             <a:r>
-              <a:t>Fake news, manipulace a obsah vytvořený AI</a:t>
+              <a:t>Fake news, manipulace a obsah vytvořený AI</a:t>
             </a:r>
           </a:p>
         </p:txBody>
@@ -1919,7 +1919,7 @@
               </a:defRPr>
             </a:pPr>
             <a:r>
-              <a:t>Student oddělí tvrzení, emoci a důkaz v realistickém sociálním příspěvku a navrhne ověření fotografie bez ukvapeného závěru.</a:t>
+              <a:t>Student oddělí tvrzení, emoci a důkaz v realistickém sociálním příspěvku a navrhne ověření fotografie bez ukvapeného závěru.</a:t>
             </a:r>
           </a:p>
         </p:txBody>
@@ -2387,7 +2387,7 @@
               </a:defRPr>
             </a:pPr>
             <a:r>
-              <a:t>Co fotografie skutečně dokazuje — a co doplnil popisek?</a:t>
+              <a:t>Co fotografie skutečně dokazuje — a co doplnil popisek?</a:t>
             </a:r>
           </a:p>
         </p:txBody>
@@ -2809,7 +2809,7 @@
               </a:defRPr>
             </a:pPr>
             <a:r>
-              <a:t>Odděl přesnou informaci od názoru a domněnky. Musí být možné říct, co by tvrzení potvrdilo.</a:t>
+              <a:t>Odděl přesnou informaci od názoru a domněnky. Musí být možné říct, co by tvrzení potvrdilo.</a:t>
             </a:r>
           </a:p>
         </p:txBody>
@@ -2944,7 +2944,7 @@
               </a:defRPr>
             </a:pPr>
             <a:r>
-              <a:t>Silná emoce a tlak na okamžité sdílení jsou signál k ověření, nikoli důkaz nepravdivosti.</a:t>
+              <a:t>Silná emoce a tlak na okamžité sdílení jsou signál k ověření, nikoli důkaz nepravdivosti.</a:t>
             </a:r>
           </a:p>
         </p:txBody>
@@ -3034,7 +3034,7 @@
               </a:defRPr>
             </a:pPr>
             <a:r>
-              <a:t>Důkaz a kontext</a:t>
+              <a:t>Důkaz a kontext</a:t>
             </a:r>
           </a:p>
         </p:txBody>
@@ -3079,7 +3079,7 @@
               </a:defRPr>
             </a:pPr>
             <a:r>
-              <a:t>Fotografie může být reálná, ale stále nemusí dokazovat místo, datum ani příběh v popisku.</a:t>
+              <a:t>Fotografie může být reálná, ale stále nemusí dokazovat místo, datum ani příběh v popisku.</a:t>
             </a:r>
           </a:p>
         </p:txBody>
@@ -3155,7 +3155,7 @@
               </a:defRPr>
             </a:pPr>
             <a:r>
-              <a:t>Nejde o rychlý tip. Jde o postup, který lze vysvětlit a zopakovat.</a:t>
+              <a:t>Nejde o rychlý tip. Jde o postup, který lze vysvětlit a zopakovat.</a:t>
             </a:r>
           </a:p>
         </p:txBody>
@@ -3485,7 +3485,7 @@
               </a:defRPr>
             </a:pPr>
             <a:r>
-              <a:t>Neověřený příspěvek.html ze složky Podklady k aktivitám, digitální pracovní sešit</a:t>
+              <a:t>Neověřený příspěvek.html ze složky Podklady k aktivitám, digitální pracovní sešit</a:t>
             </a:r>
           </a:p>
         </p:txBody>
@@ -3651,7 +3651,7 @@
               </a:defRPr>
             </a:pPr>
             <a:r>
-              <a:t>Označ tvrzení, emoce, údajný důkaz, výzvu k akci a chybějící informace.</a:t>
+              <a:t>Označ tvrzení, emoce, údajný důkaz, výzvu k akci a chybějící informace.</a:t>
             </a:r>
           </a:p>
         </p:txBody>
@@ -3817,7 +3817,7 @@
               </a:defRPr>
             </a:pPr>
             <a:r>
-              <a:t>Dohledej původ snímku, datum, vyjádření instituce a nezávislý zdroj.</a:t>
+              <a:t>Dohledej původ snímku, datum, vyjádření instituce a nezávislý zdroj.</a:t>
             </a:r>
           </a:p>
         </p:txBody>
@@ -3983,7 +3983,7 @@
               </a:defRPr>
             </a:pPr>
             <a:r>
-              <a:t>Označ nejistotu, odstraň nátlak na sdílení a nepřidávej nové nedoložené tvrzení.</a:t>
+              <a:t>Označ nejistotu, odstraň nátlak na sdílení a nepřidávej nové nedoložené tvrzení.</a:t>
             </a:r>
           </a:p>
         </p:txBody>
@@ -4073,7 +4073,7 @@
               </a:defRPr>
             </a:pPr>
             <a:r>
-              <a:t>Barevná analýza příspěvku, ověřovací postup a neutrální přepis.</a:t>
+              <a:t>Barevná analýza příspěvku, ověřovací postup a neutrální přepis.</a:t>
             </a:r>
           </a:p>
         </p:txBody>
@@ -4479,7 +4479,7 @@
               </a:defRPr>
             </a:pPr>
             <a:r>
-              <a:t>Student označí nejméně tři manipulační prvky a uvede dva nezávislé kroky ověření.</a:t>
+              <a:t>Student označí nejméně tři manipulační prvky a uvede dva nezávislé kroky ověření.</a:t>
             </a:r>
           </a:p>
         </p:txBody>
@@ -4645,7 +4645,7 @@
               </a:defRPr>
             </a:pPr>
             <a:r>
-              <a:t>Co přesně fotografie ukazuje a co už do ní vkládá popisek?</a:t>
+              <a:t>Co přesně fotografie ukazuje a co už do ní vkládá popisek?</a:t>
             </a:r>
           </a:p>
         </p:txBody>
@@ -5352,7 +5352,7 @@
               </a:defRPr>
             </a:pPr>
             <a:r>
-              <a:t>Výrazy okamžitě, celý měsíc, média mlčí a kdo nesdílí, tomu nezáleží.</a:t>
+              <a:t>Výrazy okamžitě, celý měsíc, média mlčí a kdo nesdílí, tomu nezáleží.</a:t>
             </a:r>
           </a:p>
         </p:txBody>
@@ -5698,7 +5698,7 @@
               </a:defRPr>
             </a:pPr>
             <a:r>
-              <a:t>Realističnost neprokazuje místo, datum ani souvislost s tvrzením.</a:t>
+              <a:t>Realističnost neprokazuje místo, datum ani souvislost s tvrzením.</a:t>
             </a:r>
           </a:p>
         </p:txBody>
@@ -5743,7 +5743,7 @@
               </a:defRPr>
             </a:pPr>
             <a:r>
-              <a:t>Vrať se k úvodnímu rozhodnutí. Co bys teď změnil — a proč?</a:t>
+              <a:t>Vrať se k úvodnímu rozhodnutí. Co bys teď změnil — a proč?</a:t>
             </a:r>
           </a:p>
         </p:txBody>
